--- a/PPTs/L4-Exercises.pptx
+++ b/PPTs/L4-Exercises.pptx
@@ -848,7 +848,7 @@
           <a:p>
             <a:r>
               <a:rPr lang="en-GB" dirty="0"/>
-              <a:t>The lawyers are so busy talking that they can only grab one chopstick at a time. Design a deadlock-free algorithm using monitors and Bankers algorithm. </a:t>
+              <a:t>The lawyers are so busy talking that they can only grab one chopstick at a time. Design a deadlock-free algorithm using monitors and Banker’s algorithm. </a:t>
             </a:r>
             <a:endParaRPr lang="en-SE" dirty="0"/>
           </a:p>
@@ -4368,7 +4368,7 @@
           <a:p>
             <a:r>
               <a:rPr lang="en-GB" dirty="0"/>
-              <a:t>If each lawyer has 4 arms, and there is a pile of knives and forks at </a:t>
+              <a:t>There are N ≥ 2 lawyers, each lawyer has 4 arms, and there is a pile of knives and forks at </a:t>
             </a:r>
             <a:r>
               <a:rPr lang="en-GB" dirty="0" err="1"/>
@@ -4518,7 +4518,7 @@
           <a:p>
             <a:r>
               <a:rPr lang="en-GB" dirty="0"/>
-              <a:t>If each lawyer has 4 arms, and there is a pile of knives and forks at </a:t>
+              <a:t>There are N ≥ 2 lawyers, each lawyer has 4 arms, and there is a pile of knives and forks at </a:t>
             </a:r>
             <a:r>
               <a:rPr lang="en-GB" dirty="0" err="1"/>
@@ -5823,7 +5823,7 @@
           <a:p>
             <a:r>
               <a:rPr lang="en-GB" dirty="0"/>
-              <a:t>Quiz: Banker’s Algorithm I</a:t>
+              <a:t>Quiz: Banker’s algorithm I</a:t>
             </a:r>
             <a:endParaRPr lang="en-SE" dirty="0"/>
           </a:p>
@@ -6379,7 +6379,7 @@
                 <a:latin typeface="Gill Sans" panose="020B0502020104020203"/>
                 <a:ea typeface="宋体" charset="-122"/>
               </a:rPr>
-              <a:t>4 processes P1 through P5; 3 resource types R1, R2, R3 with 7, 3, 6 instances each.</a:t>
+              <a:t>5 processes P1 through P5; 3 resource types R1, R2, R3 with 7, 3, 6 instances each.</a:t>
             </a:r>
           </a:p>
           <a:p>
@@ -8117,7 +8117,7 @@
                 <a:latin typeface="Gill Sans" panose="020B0502020104020203"/>
                 <a:ea typeface="宋体" charset="-122"/>
               </a:rPr>
-              <a:t>4 processes P1, P2, P3; 3 resource types R1, R2, R3 with 8, 6, 4 instances each.</a:t>
+              <a:t>3 processes P1, P2, P3; 3 resource types R1, R2, R3 with 8, 6, 4 instances each.</a:t>
             </a:r>
           </a:p>
           <a:p>
@@ -9178,7 +9178,7 @@
               <a:rPr lang="en-US" altLang="zh-CN" dirty="0">
                 <a:ea typeface="宋体" charset="-122"/>
               </a:rPr>
-              <a:t>Banker’s Algorithm: 4 philosophers each holding his left fork</a:t>
+              <a:t>Banker’s algorithm: 4 philosophers each holding his left fork</a:t>
             </a:r>
           </a:p>
         </p:txBody>
@@ -9374,7 +9374,7 @@
                 <a:ea typeface="+mn-ea"/>
                 <a:cs typeface="+mn-cs"/>
               </a:rPr>
-              <a:t>Suppose we have 5 philosophers P1-P5, and 5 forks R1-R5; philosopher Pi has left fork Ri, and right fork R(i+1)%5. </a:t>
+              <a:t>Suppose we have 5 philosophers P1-P5, and 5 forks R1-R5; philosopher Pi has left fork Ri, and right fork R(i%5+1). </a:t>
             </a:r>
             <a:r>
               <a:rPr lang="en-US" sz="2400" dirty="0">
@@ -10440,7 +10440,7 @@
           </p:nvPr>
         </p:nvGraphicFramePr>
         <p:xfrm>
-          <a:off x="8091273" y="4084320"/>
+          <a:off x="8091273" y="3990000"/>
           <a:ext cx="3310566" cy="2773680"/>
         </p:xfrm>
         <a:graphic>
@@ -11199,8 +11199,8 @@
         </p:nvSpPr>
         <p:spPr>
           <a:xfrm>
-            <a:off x="1219200" y="-209993"/>
-            <a:ext cx="9829800" cy="1143000"/>
+            <a:off x="914400" y="-114300"/>
+            <a:ext cx="10363200" cy="1143000"/>
           </a:xfrm>
         </p:spPr>
         <p:txBody>
@@ -11212,7 +11212,7 @@
               <a:rPr lang="en-US" altLang="zh-CN" dirty="0">
                 <a:ea typeface="宋体" charset="-122"/>
               </a:rPr>
-              <a:t>Banker’s Algorithm: 5 philosophers each holding his left fork</a:t>
+              <a:t>Banker’s algorithm: 5 philosophers each holding his left fork</a:t>
             </a:r>
           </a:p>
         </p:txBody>
@@ -12474,7 +12474,7 @@
             </a:r>
             <a:r>
               <a:rPr lang="en-GB" dirty="0"/>
-              <a:t> of the table. In order to eat, a lawyer must have one chopstick in each hand. Assume total number of chopsticks &gt;= number of hands of each lawyer, so at least one lawyer can eat.</a:t>
+              <a:t> of the table. In order to eat, a lawyer must have one chopstick in each hand. Assume total number of chopsticks ≥ number of hands of each lawyer, so at least one lawyer can eat.</a:t>
             </a:r>
           </a:p>
           <a:p>
@@ -12507,8 +12507,8 @@
         </p:nvSpPr>
         <p:spPr bwMode="auto">
           <a:xfrm>
-            <a:off x="4267200" y="6477000"/>
-            <a:ext cx="4419600" cy="304801"/>
+            <a:off x="3296000" y="6477000"/>
+            <a:ext cx="5600000" cy="304801"/>
           </a:xfrm>
           <a:prstGeom prst="rect">
             <a:avLst/>
@@ -12550,7 +12550,7 @@
               <a:rPr lang="en-GB" sz="1400" b="0" dirty="0">
                 <a:latin typeface="Gill Sans" panose="020B0502020104020203"/>
               </a:rPr>
-              <a:t>Ack: this example is taken from UC Berkeley CS162 course.</a:t>
+              <a:t>Ack: this example is taken from UC Berkeley CS 162 course.</a:t>
             </a:r>
             <a:endParaRPr kumimoji="0" lang="en-SE" sz="1400" b="0" i="0" u="none" strike="noStrike" cap="none" normalizeH="0" baseline="0" dirty="0">
               <a:ln>
@@ -12655,7 +12655,7 @@
           <a:p>
             <a:r>
               <a:rPr lang="en-GB" dirty="0"/>
-              <a:t>If each lawyer has 2 arms, and there is a pile of 5 chopsticks at the </a:t>
+              <a:t>There are 5 lawyers, each lawyer has 2 arms, and there is a pile of 5 chopsticks at the </a:t>
             </a:r>
             <a:r>
               <a:rPr lang="en-GB" dirty="0" err="1"/>
@@ -12703,13 +12703,13 @@
           <a:p>
             <a:r>
               <a:rPr lang="en-GB" dirty="0"/>
-              <a:t>Q1: Two lawyers each grab two chopsticks and start eating. Is the current state safe? Check it using Banker’s algorithm.</a:t>
+              <a:t>Q1: Two lawyers each grab two chopsticks and start eating. One lawyer grabs one chopstick. Is the current state safe? Check it using Banker’s algorithm.</a:t>
             </a:r>
           </a:p>
           <a:p>
             <a:r>
               <a:rPr lang="en-GB" dirty="0"/>
-              <a:t>Q2: Each lawyer grabs 1 chopstick. Is the current state safe? Check it using Banker’s algorithm. Check it using Banker’s algorithm.</a:t>
+              <a:t>Q2: Each lawyer grabs 1 chopstick. Is the current state safe? Check it using Banker’s algorithm.</a:t>
             </a:r>
           </a:p>
           <a:p>
@@ -12808,7 +12808,7 @@
           <a:p>
             <a:r>
               <a:rPr lang="en-GB" dirty="0"/>
-              <a:t>If each lawyer has 2 arms, and there is a pile of knives and forks at </a:t>
+              <a:t>There are N ≥ 2 lawyers, each lawyer has 2 arms, and there is a pile of knives and forks at </a:t>
             </a:r>
             <a:r>
               <a:rPr lang="en-GB" dirty="0" err="1"/>
